--- a/data/test.pptx
+++ b/data/test.pptx
@@ -3104,7 +3104,7 @@
           <a:lstStyle/>
           <a:p>
             <a:r>
-              <a:t>测试文档</a:t>
+              <a:t>报销测试</a:t>
             </a:r>
           </a:p>
         </p:txBody>
@@ -3125,7 +3125,7 @@
           <a:lstStyle/>
           <a:p>
             <a:r>
-              <a:t>AI应用工程师学习计划：Python基础、机器学习、深度学习、NLP、计算机视觉。</a:t>
+              <a:t>出差住宿：北上广深每天450元，省会350元。出差补助80元每天。招待费人均150元。报销30日内提交。</a:t>
             </a:r>
           </a:p>
         </p:txBody>
